--- a/config/templates/business_template.pptx
+++ b/config/templates/business_template.pptx
@@ -3082,6 +3082,22 @@
 <file path=ppt/slides/slide1.xml><?xml version="1.0" encoding="utf-8"?>
 <p:sld xmlns:a="http://schemas.openxmlformats.org/drawingml/2006/main" xmlns:p="http://schemas.openxmlformats.org/presentationml/2006/main" xmlns:r="http://schemas.openxmlformats.org/officeDocument/2006/relationships">
   <p:cSld>
+    <p:bg>
+      <p:bgPr>
+        <a:gradFill rotWithShape="1">
+          <a:gsLst>
+            <a:gs pos="0">
+              <a:srgbClr val="0D1B3E"/>
+            </a:gs>
+            <a:gs pos="100000">
+              <a:srgbClr val="19376D"/>
+            </a:gs>
+          </a:gsLst>
+          <a:lin scaled="0" ang="16200000"/>
+        </a:gradFill>
+        <a:effectLst/>
+      </p:bgPr>
+    </p:bg>
     <p:spTree>
       <p:nvGrpSpPr>
         <p:cNvPr id="1" name=""/>
@@ -3105,14 +3121,14 @@
           <a:lstStyle/>
           <a:p>
             <a:pPr>
-              <a:defRPr sz="4400" b="1">
+              <a:defRPr sz="5400" b="1">
                 <a:solidFill>
-                  <a:srgbClr val="003366"/>
+                  <a:srgbClr val="FFFFFF"/>
                 </a:solidFill>
               </a:defRPr>
             </a:pPr>
             <a:r>
-              <a:t>简约商务风格</a:t>
+              <a:t>现代商务风格</a:t>
             </a:r>
           </a:p>
         </p:txBody>
@@ -3133,15 +3149,101 @@
           <a:lstStyle/>
           <a:p>
             <a:pPr>
-              <a:defRPr sz="2400">
+              <a:defRPr sz="2800">
                 <a:solidFill>
-                  <a:srgbClr val="666666"/>
+                  <a:srgbClr val="ECF0F1"/>
                 </a:solidFill>
               </a:defRPr>
             </a:pPr>
             <a:r>
-              <a:t>适合商务汇报、项目展示</a:t>
-            </a:r>
+              <a:t>专业 · 简洁 · 高效</a:t>
+            </a:r>
+          </a:p>
+        </p:txBody>
+      </p:sp>
+      <p:sp>
+        <p:nvSpPr>
+          <p:cNvPr id="4" name="Rectangle 3"/>
+          <p:cNvSpPr/>
+          <p:nvPr/>
+        </p:nvSpPr>
+        <p:spPr>
+          <a:xfrm>
+            <a:off x="-914400" y="3200400"/>
+            <a:ext cx="3200400" cy="3200400"/>
+          </a:xfrm>
+          <a:prstGeom prst="rect">
+            <a:avLst/>
+          </a:prstGeom>
+          <a:solidFill>
+            <a:srgbClr val="2980B9"/>
+          </a:solidFill>
+          <a:ln>
+            <a:noFill/>
+          </a:ln>
+        </p:spPr>
+        <p:style>
+          <a:lnRef idx="1">
+            <a:schemeClr val="accent1"/>
+          </a:lnRef>
+          <a:fillRef idx="3">
+            <a:schemeClr val="accent1"/>
+          </a:fillRef>
+          <a:effectRef idx="2">
+            <a:schemeClr val="accent1"/>
+          </a:effectRef>
+          <a:fontRef idx="minor">
+            <a:schemeClr val="lt1"/>
+          </a:fontRef>
+        </p:style>
+        <p:txBody>
+          <a:bodyPr rtlCol="0" anchor="ctr"/>
+          <a:lstStyle/>
+          <a:p>
+            <a:pPr algn="ctr"/>
+          </a:p>
+        </p:txBody>
+      </p:sp>
+      <p:sp>
+        <p:nvSpPr>
+          <p:cNvPr id="5" name="Rectangle 4"/>
+          <p:cNvSpPr/>
+          <p:nvPr/>
+        </p:nvSpPr>
+        <p:spPr>
+          <a:xfrm>
+            <a:off x="7315200" y="-914400"/>
+            <a:ext cx="2743200" cy="2743200"/>
+          </a:xfrm>
+          <a:prstGeom prst="rect">
+            <a:avLst/>
+          </a:prstGeom>
+          <a:solidFill>
+            <a:srgbClr val="F39C12"/>
+          </a:solidFill>
+          <a:ln>
+            <a:noFill/>
+          </a:ln>
+        </p:spPr>
+        <p:style>
+          <a:lnRef idx="1">
+            <a:schemeClr val="accent1"/>
+          </a:lnRef>
+          <a:fillRef idx="3">
+            <a:schemeClr val="accent1"/>
+          </a:fillRef>
+          <a:effectRef idx="2">
+            <a:schemeClr val="accent1"/>
+          </a:effectRef>
+          <a:fontRef idx="minor">
+            <a:schemeClr val="lt1"/>
+          </a:fontRef>
+        </p:style>
+        <p:txBody>
+          <a:bodyPr rtlCol="0" anchor="ctr"/>
+          <a:lstStyle/>
+          <a:p>
+            <a:pPr algn="ctr"/>
           </a:p>
         </p:txBody>
       </p:sp>
@@ -3156,6 +3258,22 @@
 <file path=ppt/slides/slide2.xml><?xml version="1.0" encoding="utf-8"?>
 <p:sld xmlns:a="http://schemas.openxmlformats.org/drawingml/2006/main" xmlns:p="http://schemas.openxmlformats.org/presentationml/2006/main" xmlns:r="http://schemas.openxmlformats.org/officeDocument/2006/relationships">
   <p:cSld>
+    <p:bg>
+      <p:bgPr>
+        <a:gradFill rotWithShape="1">
+          <a:gsLst>
+            <a:gs pos="0">
+              <a:srgbClr val="0D1B3E"/>
+            </a:gs>
+            <a:gs pos="100000">
+              <a:srgbClr val="19376D"/>
+            </a:gs>
+          </a:gsLst>
+          <a:lin scaled="0" ang="16200000"/>
+        </a:gradFill>
+        <a:effectLst/>
+      </p:bgPr>
+    </p:bg>
     <p:spTree>
       <p:nvGrpSpPr>
         <p:cNvPr id="1" name=""/>
@@ -3179,9 +3297,9 @@
           <a:lstStyle/>
           <a:p>
             <a:pPr>
-              <a:defRPr sz="3200">
+              <a:defRPr sz="3600" b="1">
                 <a:solidFill>
-                  <a:srgbClr val="003366"/>
+                  <a:srgbClr val="FFFFFF"/>
                 </a:solidFill>
               </a:defRPr>
             </a:pPr>
@@ -3207,19 +3325,70 @@
           <a:lstStyle/>
           <a:p>
             <a:pPr>
-              <a:defRPr sz="1800"/>
+              <a:defRPr sz="2000">
+                <a:solidFill>
+                  <a:srgbClr val="ECF0F1"/>
+                </a:solidFill>
+              </a:defRPr>
             </a:pPr>
             <a:r>
-              <a:t>第一个要点</a:t>
+              <a:t>核心业务指标</a:t>
             </a:r>
           </a:p>
           <a:p>
             <a:pPr>
-              <a:defRPr sz="1800"/>
+              <a:defRPr sz="2000">
+                <a:solidFill>
+                  <a:srgbClr val="ECF0F1"/>
+                </a:solidFill>
+              </a:defRPr>
             </a:pPr>
             <a:r>
-              <a:t>第二个要点</a:t>
-            </a:r>
+              <a:t>市场增长策略</a:t>
+            </a:r>
+          </a:p>
+        </p:txBody>
+      </p:sp>
+      <p:sp>
+        <p:nvSpPr>
+          <p:cNvPr id="4" name="Rectangle 3"/>
+          <p:cNvSpPr/>
+          <p:nvPr/>
+        </p:nvSpPr>
+        <p:spPr>
+          <a:xfrm>
+            <a:off x="0" y="0"/>
+            <a:ext cx="9144000" cy="137160"/>
+          </a:xfrm>
+          <a:prstGeom prst="rect">
+            <a:avLst/>
+          </a:prstGeom>
+          <a:solidFill>
+            <a:srgbClr val="3498DB"/>
+          </a:solidFill>
+          <a:ln>
+            <a:noFill/>
+          </a:ln>
+        </p:spPr>
+        <p:style>
+          <a:lnRef idx="1">
+            <a:schemeClr val="accent1"/>
+          </a:lnRef>
+          <a:fillRef idx="3">
+            <a:schemeClr val="accent1"/>
+          </a:fillRef>
+          <a:effectRef idx="2">
+            <a:schemeClr val="accent1"/>
+          </a:effectRef>
+          <a:fontRef idx="minor">
+            <a:schemeClr val="lt1"/>
+          </a:fontRef>
+        </p:style>
+        <p:txBody>
+          <a:bodyPr rtlCol="0" anchor="ctr"/>
+          <a:lstStyle/>
+          <a:p>
+            <a:pPr algn="ctr"/>
           </a:p>
         </p:txBody>
       </p:sp>

--- a/config/templates/business_template.pptx
+++ b/config/templates/business_template.pptx
@@ -7,8 +7,9 @@
   <p:sldIdLst>
     <p:sldId id="256" r:id="rId7"/>
     <p:sldId id="257" r:id="rId8"/>
+    <p:sldId id="258" r:id="rId9"/>
   </p:sldIdLst>
-  <p:sldSz cx="9144000" cy="5143500" type="screen4x3"/>
+  <p:sldSz cx="12188952" cy="6858000" type="screen4x3"/>
   <p:notesSz cx="6858000" cy="9144000"/>
   <p:defaultTextStyle>
     <a:defPPr>
@@ -3087,13 +3088,13 @@
         <a:gradFill rotWithShape="1">
           <a:gsLst>
             <a:gs pos="0">
-              <a:srgbClr val="0D1B3E"/>
+              <a:srgbClr val="015DBB"/>
             </a:gs>
             <a:gs pos="100000">
-              <a:srgbClr val="19376D"/>
+              <a:srgbClr val="64B4FF"/>
             </a:gs>
           </a:gsLst>
-          <a:lin scaled="0" ang="16200000"/>
+          <a:lin scaled="0" ang="13500000"/>
         </a:gradFill>
         <a:effectLst/>
       </p:bgPr>
@@ -3107,76 +3108,1712 @@
       <p:grpSpPr/>
       <p:sp>
         <p:nvSpPr>
-          <p:cNvPr id="2" name="Title 1"/>
-          <p:cNvSpPr>
-            <a:spLocks noGrp="1"/>
-          </p:cNvSpPr>
-          <p:nvPr>
-            <p:ph type="ctrTitle"/>
-          </p:nvPr>
-        </p:nvSpPr>
-        <p:spPr/>
-        <p:txBody>
-          <a:bodyPr/>
-          <a:lstStyle/>
-          <a:p>
-            <a:pPr>
-              <a:defRPr sz="5400" b="1">
+          <p:cNvPr id="2" name="Rectangle 1"/>
+          <p:cNvSpPr/>
+          <p:nvPr/>
+        </p:nvSpPr>
+        <p:spPr>
+          <a:xfrm>
+            <a:off x="10058400" y="457200"/>
+            <a:ext cx="73152" cy="73152"/>
+          </a:xfrm>
+          <a:prstGeom prst="rect">
+            <a:avLst/>
+          </a:prstGeom>
+          <a:solidFill>
+            <a:srgbClr val="FFFFFF">
+              <a:lumMod val="50000"/>
+            </a:srgbClr>
+          </a:solidFill>
+          <a:ln>
+            <a:noFill/>
+          </a:ln>
+        </p:spPr>
+        <p:style>
+          <a:lnRef idx="1">
+            <a:schemeClr val="accent1"/>
+          </a:lnRef>
+          <a:fillRef idx="3">
+            <a:schemeClr val="accent1"/>
+          </a:fillRef>
+          <a:effectRef idx="2">
+            <a:schemeClr val="accent1"/>
+          </a:effectRef>
+          <a:fontRef idx="minor">
+            <a:schemeClr val="lt1"/>
+          </a:fontRef>
+        </p:style>
+        <p:txBody>
+          <a:bodyPr rtlCol="0" anchor="ctr"/>
+          <a:lstStyle/>
+          <a:p>
+            <a:pPr algn="ctr"/>
+          </a:p>
+        </p:txBody>
+      </p:sp>
+      <p:sp>
+        <p:nvSpPr>
+          <p:cNvPr id="3" name="Rectangle 2"/>
+          <p:cNvSpPr/>
+          <p:nvPr/>
+        </p:nvSpPr>
+        <p:spPr>
+          <a:xfrm>
+            <a:off x="10058400" y="594360"/>
+            <a:ext cx="73152" cy="73152"/>
+          </a:xfrm>
+          <a:prstGeom prst="rect">
+            <a:avLst/>
+          </a:prstGeom>
+          <a:solidFill>
+            <a:srgbClr val="FFFFFF">
+              <a:lumMod val="50000"/>
+            </a:srgbClr>
+          </a:solidFill>
+          <a:ln>
+            <a:noFill/>
+          </a:ln>
+        </p:spPr>
+        <p:style>
+          <a:lnRef idx="1">
+            <a:schemeClr val="accent1"/>
+          </a:lnRef>
+          <a:fillRef idx="3">
+            <a:schemeClr val="accent1"/>
+          </a:fillRef>
+          <a:effectRef idx="2">
+            <a:schemeClr val="accent1"/>
+          </a:effectRef>
+          <a:fontRef idx="minor">
+            <a:schemeClr val="lt1"/>
+          </a:fontRef>
+        </p:style>
+        <p:txBody>
+          <a:bodyPr rtlCol="0" anchor="ctr"/>
+          <a:lstStyle/>
+          <a:p>
+            <a:pPr algn="ctr"/>
+          </a:p>
+        </p:txBody>
+      </p:sp>
+      <p:sp>
+        <p:nvSpPr>
+          <p:cNvPr id="4" name="Rectangle 3"/>
+          <p:cNvSpPr/>
+          <p:nvPr/>
+        </p:nvSpPr>
+        <p:spPr>
+          <a:xfrm>
+            <a:off x="10058400" y="731520"/>
+            <a:ext cx="73152" cy="73152"/>
+          </a:xfrm>
+          <a:prstGeom prst="rect">
+            <a:avLst/>
+          </a:prstGeom>
+          <a:solidFill>
+            <a:srgbClr val="FFFFFF">
+              <a:lumMod val="50000"/>
+            </a:srgbClr>
+          </a:solidFill>
+          <a:ln>
+            <a:noFill/>
+          </a:ln>
+        </p:spPr>
+        <p:style>
+          <a:lnRef idx="1">
+            <a:schemeClr val="accent1"/>
+          </a:lnRef>
+          <a:fillRef idx="3">
+            <a:schemeClr val="accent1"/>
+          </a:fillRef>
+          <a:effectRef idx="2">
+            <a:schemeClr val="accent1"/>
+          </a:effectRef>
+          <a:fontRef idx="minor">
+            <a:schemeClr val="lt1"/>
+          </a:fontRef>
+        </p:style>
+        <p:txBody>
+          <a:bodyPr rtlCol="0" anchor="ctr"/>
+          <a:lstStyle/>
+          <a:p>
+            <a:pPr algn="ctr"/>
+          </a:p>
+        </p:txBody>
+      </p:sp>
+      <p:sp>
+        <p:nvSpPr>
+          <p:cNvPr id="5" name="Rectangle 4"/>
+          <p:cNvSpPr/>
+          <p:nvPr/>
+        </p:nvSpPr>
+        <p:spPr>
+          <a:xfrm>
+            <a:off x="10058400" y="868680"/>
+            <a:ext cx="73152" cy="73152"/>
+          </a:xfrm>
+          <a:prstGeom prst="rect">
+            <a:avLst/>
+          </a:prstGeom>
+          <a:solidFill>
+            <a:srgbClr val="FFFFFF">
+              <a:lumMod val="50000"/>
+            </a:srgbClr>
+          </a:solidFill>
+          <a:ln>
+            <a:noFill/>
+          </a:ln>
+        </p:spPr>
+        <p:style>
+          <a:lnRef idx="1">
+            <a:schemeClr val="accent1"/>
+          </a:lnRef>
+          <a:fillRef idx="3">
+            <a:schemeClr val="accent1"/>
+          </a:fillRef>
+          <a:effectRef idx="2">
+            <a:schemeClr val="accent1"/>
+          </a:effectRef>
+          <a:fontRef idx="minor">
+            <a:schemeClr val="lt1"/>
+          </a:fontRef>
+        </p:style>
+        <p:txBody>
+          <a:bodyPr rtlCol="0" anchor="ctr"/>
+          <a:lstStyle/>
+          <a:p>
+            <a:pPr algn="ctr"/>
+          </a:p>
+        </p:txBody>
+      </p:sp>
+      <p:sp>
+        <p:nvSpPr>
+          <p:cNvPr id="6" name="Rectangle 5"/>
+          <p:cNvSpPr/>
+          <p:nvPr/>
+        </p:nvSpPr>
+        <p:spPr>
+          <a:xfrm>
+            <a:off x="10058400" y="1005840"/>
+            <a:ext cx="73152" cy="73152"/>
+          </a:xfrm>
+          <a:prstGeom prst="rect">
+            <a:avLst/>
+          </a:prstGeom>
+          <a:solidFill>
+            <a:srgbClr val="FFFFFF">
+              <a:lumMod val="50000"/>
+            </a:srgbClr>
+          </a:solidFill>
+          <a:ln>
+            <a:noFill/>
+          </a:ln>
+        </p:spPr>
+        <p:style>
+          <a:lnRef idx="1">
+            <a:schemeClr val="accent1"/>
+          </a:lnRef>
+          <a:fillRef idx="3">
+            <a:schemeClr val="accent1"/>
+          </a:fillRef>
+          <a:effectRef idx="2">
+            <a:schemeClr val="accent1"/>
+          </a:effectRef>
+          <a:fontRef idx="minor">
+            <a:schemeClr val="lt1"/>
+          </a:fontRef>
+        </p:style>
+        <p:txBody>
+          <a:bodyPr rtlCol="0" anchor="ctr"/>
+          <a:lstStyle/>
+          <a:p>
+            <a:pPr algn="ctr"/>
+          </a:p>
+        </p:txBody>
+      </p:sp>
+      <p:sp>
+        <p:nvSpPr>
+          <p:cNvPr id="7" name="Rectangle 6"/>
+          <p:cNvSpPr/>
+          <p:nvPr/>
+        </p:nvSpPr>
+        <p:spPr>
+          <a:xfrm>
+            <a:off x="10058400" y="1143000"/>
+            <a:ext cx="73152" cy="73152"/>
+          </a:xfrm>
+          <a:prstGeom prst="rect">
+            <a:avLst/>
+          </a:prstGeom>
+          <a:solidFill>
+            <a:srgbClr val="FFFFFF">
+              <a:lumMod val="50000"/>
+            </a:srgbClr>
+          </a:solidFill>
+          <a:ln>
+            <a:noFill/>
+          </a:ln>
+        </p:spPr>
+        <p:style>
+          <a:lnRef idx="1">
+            <a:schemeClr val="accent1"/>
+          </a:lnRef>
+          <a:fillRef idx="3">
+            <a:schemeClr val="accent1"/>
+          </a:fillRef>
+          <a:effectRef idx="2">
+            <a:schemeClr val="accent1"/>
+          </a:effectRef>
+          <a:fontRef idx="minor">
+            <a:schemeClr val="lt1"/>
+          </a:fontRef>
+        </p:style>
+        <p:txBody>
+          <a:bodyPr rtlCol="0" anchor="ctr"/>
+          <a:lstStyle/>
+          <a:p>
+            <a:pPr algn="ctr"/>
+          </a:p>
+        </p:txBody>
+      </p:sp>
+      <p:sp>
+        <p:nvSpPr>
+          <p:cNvPr id="8" name="Rectangle 7"/>
+          <p:cNvSpPr/>
+          <p:nvPr/>
+        </p:nvSpPr>
+        <p:spPr>
+          <a:xfrm>
+            <a:off x="10195560" y="457200"/>
+            <a:ext cx="73152" cy="73152"/>
+          </a:xfrm>
+          <a:prstGeom prst="rect">
+            <a:avLst/>
+          </a:prstGeom>
+          <a:solidFill>
+            <a:srgbClr val="FFFFFF">
+              <a:lumMod val="50000"/>
+            </a:srgbClr>
+          </a:solidFill>
+          <a:ln>
+            <a:noFill/>
+          </a:ln>
+        </p:spPr>
+        <p:style>
+          <a:lnRef idx="1">
+            <a:schemeClr val="accent1"/>
+          </a:lnRef>
+          <a:fillRef idx="3">
+            <a:schemeClr val="accent1"/>
+          </a:fillRef>
+          <a:effectRef idx="2">
+            <a:schemeClr val="accent1"/>
+          </a:effectRef>
+          <a:fontRef idx="minor">
+            <a:schemeClr val="lt1"/>
+          </a:fontRef>
+        </p:style>
+        <p:txBody>
+          <a:bodyPr rtlCol="0" anchor="ctr"/>
+          <a:lstStyle/>
+          <a:p>
+            <a:pPr algn="ctr"/>
+          </a:p>
+        </p:txBody>
+      </p:sp>
+      <p:sp>
+        <p:nvSpPr>
+          <p:cNvPr id="9" name="Rectangle 8"/>
+          <p:cNvSpPr/>
+          <p:nvPr/>
+        </p:nvSpPr>
+        <p:spPr>
+          <a:xfrm>
+            <a:off x="10195560" y="594360"/>
+            <a:ext cx="73152" cy="73152"/>
+          </a:xfrm>
+          <a:prstGeom prst="rect">
+            <a:avLst/>
+          </a:prstGeom>
+          <a:solidFill>
+            <a:srgbClr val="FFFFFF">
+              <a:lumMod val="50000"/>
+            </a:srgbClr>
+          </a:solidFill>
+          <a:ln>
+            <a:noFill/>
+          </a:ln>
+        </p:spPr>
+        <p:style>
+          <a:lnRef idx="1">
+            <a:schemeClr val="accent1"/>
+          </a:lnRef>
+          <a:fillRef idx="3">
+            <a:schemeClr val="accent1"/>
+          </a:fillRef>
+          <a:effectRef idx="2">
+            <a:schemeClr val="accent1"/>
+          </a:effectRef>
+          <a:fontRef idx="minor">
+            <a:schemeClr val="lt1"/>
+          </a:fontRef>
+        </p:style>
+        <p:txBody>
+          <a:bodyPr rtlCol="0" anchor="ctr"/>
+          <a:lstStyle/>
+          <a:p>
+            <a:pPr algn="ctr"/>
+          </a:p>
+        </p:txBody>
+      </p:sp>
+      <p:sp>
+        <p:nvSpPr>
+          <p:cNvPr id="10" name="Rectangle 9"/>
+          <p:cNvSpPr/>
+          <p:nvPr/>
+        </p:nvSpPr>
+        <p:spPr>
+          <a:xfrm>
+            <a:off x="10195560" y="731520"/>
+            <a:ext cx="73152" cy="73152"/>
+          </a:xfrm>
+          <a:prstGeom prst="rect">
+            <a:avLst/>
+          </a:prstGeom>
+          <a:solidFill>
+            <a:srgbClr val="FFFFFF">
+              <a:lumMod val="50000"/>
+            </a:srgbClr>
+          </a:solidFill>
+          <a:ln>
+            <a:noFill/>
+          </a:ln>
+        </p:spPr>
+        <p:style>
+          <a:lnRef idx="1">
+            <a:schemeClr val="accent1"/>
+          </a:lnRef>
+          <a:fillRef idx="3">
+            <a:schemeClr val="accent1"/>
+          </a:fillRef>
+          <a:effectRef idx="2">
+            <a:schemeClr val="accent1"/>
+          </a:effectRef>
+          <a:fontRef idx="minor">
+            <a:schemeClr val="lt1"/>
+          </a:fontRef>
+        </p:style>
+        <p:txBody>
+          <a:bodyPr rtlCol="0" anchor="ctr"/>
+          <a:lstStyle/>
+          <a:p>
+            <a:pPr algn="ctr"/>
+          </a:p>
+        </p:txBody>
+      </p:sp>
+      <p:sp>
+        <p:nvSpPr>
+          <p:cNvPr id="11" name="Rectangle 10"/>
+          <p:cNvSpPr/>
+          <p:nvPr/>
+        </p:nvSpPr>
+        <p:spPr>
+          <a:xfrm>
+            <a:off x="10195560" y="868680"/>
+            <a:ext cx="73152" cy="73152"/>
+          </a:xfrm>
+          <a:prstGeom prst="rect">
+            <a:avLst/>
+          </a:prstGeom>
+          <a:solidFill>
+            <a:srgbClr val="FFFFFF">
+              <a:lumMod val="50000"/>
+            </a:srgbClr>
+          </a:solidFill>
+          <a:ln>
+            <a:noFill/>
+          </a:ln>
+        </p:spPr>
+        <p:style>
+          <a:lnRef idx="1">
+            <a:schemeClr val="accent1"/>
+          </a:lnRef>
+          <a:fillRef idx="3">
+            <a:schemeClr val="accent1"/>
+          </a:fillRef>
+          <a:effectRef idx="2">
+            <a:schemeClr val="accent1"/>
+          </a:effectRef>
+          <a:fontRef idx="minor">
+            <a:schemeClr val="lt1"/>
+          </a:fontRef>
+        </p:style>
+        <p:txBody>
+          <a:bodyPr rtlCol="0" anchor="ctr"/>
+          <a:lstStyle/>
+          <a:p>
+            <a:pPr algn="ctr"/>
+          </a:p>
+        </p:txBody>
+      </p:sp>
+      <p:sp>
+        <p:nvSpPr>
+          <p:cNvPr id="12" name="Rectangle 11"/>
+          <p:cNvSpPr/>
+          <p:nvPr/>
+        </p:nvSpPr>
+        <p:spPr>
+          <a:xfrm>
+            <a:off x="10195560" y="1005840"/>
+            <a:ext cx="73152" cy="73152"/>
+          </a:xfrm>
+          <a:prstGeom prst="rect">
+            <a:avLst/>
+          </a:prstGeom>
+          <a:solidFill>
+            <a:srgbClr val="FFFFFF">
+              <a:lumMod val="50000"/>
+            </a:srgbClr>
+          </a:solidFill>
+          <a:ln>
+            <a:noFill/>
+          </a:ln>
+        </p:spPr>
+        <p:style>
+          <a:lnRef idx="1">
+            <a:schemeClr val="accent1"/>
+          </a:lnRef>
+          <a:fillRef idx="3">
+            <a:schemeClr val="accent1"/>
+          </a:fillRef>
+          <a:effectRef idx="2">
+            <a:schemeClr val="accent1"/>
+          </a:effectRef>
+          <a:fontRef idx="minor">
+            <a:schemeClr val="lt1"/>
+          </a:fontRef>
+        </p:style>
+        <p:txBody>
+          <a:bodyPr rtlCol="0" anchor="ctr"/>
+          <a:lstStyle/>
+          <a:p>
+            <a:pPr algn="ctr"/>
+          </a:p>
+        </p:txBody>
+      </p:sp>
+      <p:sp>
+        <p:nvSpPr>
+          <p:cNvPr id="13" name="Rectangle 12"/>
+          <p:cNvSpPr/>
+          <p:nvPr/>
+        </p:nvSpPr>
+        <p:spPr>
+          <a:xfrm>
+            <a:off x="10195560" y="1143000"/>
+            <a:ext cx="73152" cy="73152"/>
+          </a:xfrm>
+          <a:prstGeom prst="rect">
+            <a:avLst/>
+          </a:prstGeom>
+          <a:solidFill>
+            <a:srgbClr val="FFFFFF">
+              <a:lumMod val="50000"/>
+            </a:srgbClr>
+          </a:solidFill>
+          <a:ln>
+            <a:noFill/>
+          </a:ln>
+        </p:spPr>
+        <p:style>
+          <a:lnRef idx="1">
+            <a:schemeClr val="accent1"/>
+          </a:lnRef>
+          <a:fillRef idx="3">
+            <a:schemeClr val="accent1"/>
+          </a:fillRef>
+          <a:effectRef idx="2">
+            <a:schemeClr val="accent1"/>
+          </a:effectRef>
+          <a:fontRef idx="minor">
+            <a:schemeClr val="lt1"/>
+          </a:fontRef>
+        </p:style>
+        <p:txBody>
+          <a:bodyPr rtlCol="0" anchor="ctr"/>
+          <a:lstStyle/>
+          <a:p>
+            <a:pPr algn="ctr"/>
+          </a:p>
+        </p:txBody>
+      </p:sp>
+      <p:sp>
+        <p:nvSpPr>
+          <p:cNvPr id="14" name="Rectangle 13"/>
+          <p:cNvSpPr/>
+          <p:nvPr/>
+        </p:nvSpPr>
+        <p:spPr>
+          <a:xfrm>
+            <a:off x="10332720" y="457200"/>
+            <a:ext cx="73152" cy="73152"/>
+          </a:xfrm>
+          <a:prstGeom prst="rect">
+            <a:avLst/>
+          </a:prstGeom>
+          <a:solidFill>
+            <a:srgbClr val="FFFFFF">
+              <a:lumMod val="50000"/>
+            </a:srgbClr>
+          </a:solidFill>
+          <a:ln>
+            <a:noFill/>
+          </a:ln>
+        </p:spPr>
+        <p:style>
+          <a:lnRef idx="1">
+            <a:schemeClr val="accent1"/>
+          </a:lnRef>
+          <a:fillRef idx="3">
+            <a:schemeClr val="accent1"/>
+          </a:fillRef>
+          <a:effectRef idx="2">
+            <a:schemeClr val="accent1"/>
+          </a:effectRef>
+          <a:fontRef idx="minor">
+            <a:schemeClr val="lt1"/>
+          </a:fontRef>
+        </p:style>
+        <p:txBody>
+          <a:bodyPr rtlCol="0" anchor="ctr"/>
+          <a:lstStyle/>
+          <a:p>
+            <a:pPr algn="ctr"/>
+          </a:p>
+        </p:txBody>
+      </p:sp>
+      <p:sp>
+        <p:nvSpPr>
+          <p:cNvPr id="15" name="Rectangle 14"/>
+          <p:cNvSpPr/>
+          <p:nvPr/>
+        </p:nvSpPr>
+        <p:spPr>
+          <a:xfrm>
+            <a:off x="10332720" y="594360"/>
+            <a:ext cx="73152" cy="73152"/>
+          </a:xfrm>
+          <a:prstGeom prst="rect">
+            <a:avLst/>
+          </a:prstGeom>
+          <a:solidFill>
+            <a:srgbClr val="FFFFFF">
+              <a:lumMod val="50000"/>
+            </a:srgbClr>
+          </a:solidFill>
+          <a:ln>
+            <a:noFill/>
+          </a:ln>
+        </p:spPr>
+        <p:style>
+          <a:lnRef idx="1">
+            <a:schemeClr val="accent1"/>
+          </a:lnRef>
+          <a:fillRef idx="3">
+            <a:schemeClr val="accent1"/>
+          </a:fillRef>
+          <a:effectRef idx="2">
+            <a:schemeClr val="accent1"/>
+          </a:effectRef>
+          <a:fontRef idx="minor">
+            <a:schemeClr val="lt1"/>
+          </a:fontRef>
+        </p:style>
+        <p:txBody>
+          <a:bodyPr rtlCol="0" anchor="ctr"/>
+          <a:lstStyle/>
+          <a:p>
+            <a:pPr algn="ctr"/>
+          </a:p>
+        </p:txBody>
+      </p:sp>
+      <p:sp>
+        <p:nvSpPr>
+          <p:cNvPr id="16" name="Rectangle 15"/>
+          <p:cNvSpPr/>
+          <p:nvPr/>
+        </p:nvSpPr>
+        <p:spPr>
+          <a:xfrm>
+            <a:off x="10332720" y="731520"/>
+            <a:ext cx="73152" cy="73152"/>
+          </a:xfrm>
+          <a:prstGeom prst="rect">
+            <a:avLst/>
+          </a:prstGeom>
+          <a:solidFill>
+            <a:srgbClr val="FFFFFF">
+              <a:lumMod val="50000"/>
+            </a:srgbClr>
+          </a:solidFill>
+          <a:ln>
+            <a:noFill/>
+          </a:ln>
+        </p:spPr>
+        <p:style>
+          <a:lnRef idx="1">
+            <a:schemeClr val="accent1"/>
+          </a:lnRef>
+          <a:fillRef idx="3">
+            <a:schemeClr val="accent1"/>
+          </a:fillRef>
+          <a:effectRef idx="2">
+            <a:schemeClr val="accent1"/>
+          </a:effectRef>
+          <a:fontRef idx="minor">
+            <a:schemeClr val="lt1"/>
+          </a:fontRef>
+        </p:style>
+        <p:txBody>
+          <a:bodyPr rtlCol="0" anchor="ctr"/>
+          <a:lstStyle/>
+          <a:p>
+            <a:pPr algn="ctr"/>
+          </a:p>
+        </p:txBody>
+      </p:sp>
+      <p:sp>
+        <p:nvSpPr>
+          <p:cNvPr id="17" name="Rectangle 16"/>
+          <p:cNvSpPr/>
+          <p:nvPr/>
+        </p:nvSpPr>
+        <p:spPr>
+          <a:xfrm>
+            <a:off x="10332720" y="868680"/>
+            <a:ext cx="73152" cy="73152"/>
+          </a:xfrm>
+          <a:prstGeom prst="rect">
+            <a:avLst/>
+          </a:prstGeom>
+          <a:solidFill>
+            <a:srgbClr val="FFFFFF">
+              <a:lumMod val="50000"/>
+            </a:srgbClr>
+          </a:solidFill>
+          <a:ln>
+            <a:noFill/>
+          </a:ln>
+        </p:spPr>
+        <p:style>
+          <a:lnRef idx="1">
+            <a:schemeClr val="accent1"/>
+          </a:lnRef>
+          <a:fillRef idx="3">
+            <a:schemeClr val="accent1"/>
+          </a:fillRef>
+          <a:effectRef idx="2">
+            <a:schemeClr val="accent1"/>
+          </a:effectRef>
+          <a:fontRef idx="minor">
+            <a:schemeClr val="lt1"/>
+          </a:fontRef>
+        </p:style>
+        <p:txBody>
+          <a:bodyPr rtlCol="0" anchor="ctr"/>
+          <a:lstStyle/>
+          <a:p>
+            <a:pPr algn="ctr"/>
+          </a:p>
+        </p:txBody>
+      </p:sp>
+      <p:sp>
+        <p:nvSpPr>
+          <p:cNvPr id="18" name="Rectangle 17"/>
+          <p:cNvSpPr/>
+          <p:nvPr/>
+        </p:nvSpPr>
+        <p:spPr>
+          <a:xfrm>
+            <a:off x="10332720" y="1005840"/>
+            <a:ext cx="73152" cy="73152"/>
+          </a:xfrm>
+          <a:prstGeom prst="rect">
+            <a:avLst/>
+          </a:prstGeom>
+          <a:solidFill>
+            <a:srgbClr val="FFFFFF">
+              <a:lumMod val="50000"/>
+            </a:srgbClr>
+          </a:solidFill>
+          <a:ln>
+            <a:noFill/>
+          </a:ln>
+        </p:spPr>
+        <p:style>
+          <a:lnRef idx="1">
+            <a:schemeClr val="accent1"/>
+          </a:lnRef>
+          <a:fillRef idx="3">
+            <a:schemeClr val="accent1"/>
+          </a:fillRef>
+          <a:effectRef idx="2">
+            <a:schemeClr val="accent1"/>
+          </a:effectRef>
+          <a:fontRef idx="minor">
+            <a:schemeClr val="lt1"/>
+          </a:fontRef>
+        </p:style>
+        <p:txBody>
+          <a:bodyPr rtlCol="0" anchor="ctr"/>
+          <a:lstStyle/>
+          <a:p>
+            <a:pPr algn="ctr"/>
+          </a:p>
+        </p:txBody>
+      </p:sp>
+      <p:sp>
+        <p:nvSpPr>
+          <p:cNvPr id="19" name="Rectangle 18"/>
+          <p:cNvSpPr/>
+          <p:nvPr/>
+        </p:nvSpPr>
+        <p:spPr>
+          <a:xfrm>
+            <a:off x="10332720" y="1143000"/>
+            <a:ext cx="73152" cy="73152"/>
+          </a:xfrm>
+          <a:prstGeom prst="rect">
+            <a:avLst/>
+          </a:prstGeom>
+          <a:solidFill>
+            <a:srgbClr val="FFFFFF">
+              <a:lumMod val="50000"/>
+            </a:srgbClr>
+          </a:solidFill>
+          <a:ln>
+            <a:noFill/>
+          </a:ln>
+        </p:spPr>
+        <p:style>
+          <a:lnRef idx="1">
+            <a:schemeClr val="accent1"/>
+          </a:lnRef>
+          <a:fillRef idx="3">
+            <a:schemeClr val="accent1"/>
+          </a:fillRef>
+          <a:effectRef idx="2">
+            <a:schemeClr val="accent1"/>
+          </a:effectRef>
+          <a:fontRef idx="minor">
+            <a:schemeClr val="lt1"/>
+          </a:fontRef>
+        </p:style>
+        <p:txBody>
+          <a:bodyPr rtlCol="0" anchor="ctr"/>
+          <a:lstStyle/>
+          <a:p>
+            <a:pPr algn="ctr"/>
+          </a:p>
+        </p:txBody>
+      </p:sp>
+      <p:sp>
+        <p:nvSpPr>
+          <p:cNvPr id="20" name="Rectangle 19"/>
+          <p:cNvSpPr/>
+          <p:nvPr/>
+        </p:nvSpPr>
+        <p:spPr>
+          <a:xfrm>
+            <a:off x="10469880" y="457200"/>
+            <a:ext cx="73152" cy="73152"/>
+          </a:xfrm>
+          <a:prstGeom prst="rect">
+            <a:avLst/>
+          </a:prstGeom>
+          <a:solidFill>
+            <a:srgbClr val="FFFFFF">
+              <a:lumMod val="50000"/>
+            </a:srgbClr>
+          </a:solidFill>
+          <a:ln>
+            <a:noFill/>
+          </a:ln>
+        </p:spPr>
+        <p:style>
+          <a:lnRef idx="1">
+            <a:schemeClr val="accent1"/>
+          </a:lnRef>
+          <a:fillRef idx="3">
+            <a:schemeClr val="accent1"/>
+          </a:fillRef>
+          <a:effectRef idx="2">
+            <a:schemeClr val="accent1"/>
+          </a:effectRef>
+          <a:fontRef idx="minor">
+            <a:schemeClr val="lt1"/>
+          </a:fontRef>
+        </p:style>
+        <p:txBody>
+          <a:bodyPr rtlCol="0" anchor="ctr"/>
+          <a:lstStyle/>
+          <a:p>
+            <a:pPr algn="ctr"/>
+          </a:p>
+        </p:txBody>
+      </p:sp>
+      <p:sp>
+        <p:nvSpPr>
+          <p:cNvPr id="21" name="Rectangle 20"/>
+          <p:cNvSpPr/>
+          <p:nvPr/>
+        </p:nvSpPr>
+        <p:spPr>
+          <a:xfrm>
+            <a:off x="10469880" y="594360"/>
+            <a:ext cx="73152" cy="73152"/>
+          </a:xfrm>
+          <a:prstGeom prst="rect">
+            <a:avLst/>
+          </a:prstGeom>
+          <a:solidFill>
+            <a:srgbClr val="FFFFFF">
+              <a:lumMod val="50000"/>
+            </a:srgbClr>
+          </a:solidFill>
+          <a:ln>
+            <a:noFill/>
+          </a:ln>
+        </p:spPr>
+        <p:style>
+          <a:lnRef idx="1">
+            <a:schemeClr val="accent1"/>
+          </a:lnRef>
+          <a:fillRef idx="3">
+            <a:schemeClr val="accent1"/>
+          </a:fillRef>
+          <a:effectRef idx="2">
+            <a:schemeClr val="accent1"/>
+          </a:effectRef>
+          <a:fontRef idx="minor">
+            <a:schemeClr val="lt1"/>
+          </a:fontRef>
+        </p:style>
+        <p:txBody>
+          <a:bodyPr rtlCol="0" anchor="ctr"/>
+          <a:lstStyle/>
+          <a:p>
+            <a:pPr algn="ctr"/>
+          </a:p>
+        </p:txBody>
+      </p:sp>
+      <p:sp>
+        <p:nvSpPr>
+          <p:cNvPr id="22" name="Rectangle 21"/>
+          <p:cNvSpPr/>
+          <p:nvPr/>
+        </p:nvSpPr>
+        <p:spPr>
+          <a:xfrm>
+            <a:off x="10469880" y="731520"/>
+            <a:ext cx="73152" cy="73152"/>
+          </a:xfrm>
+          <a:prstGeom prst="rect">
+            <a:avLst/>
+          </a:prstGeom>
+          <a:solidFill>
+            <a:srgbClr val="FFFFFF">
+              <a:lumMod val="50000"/>
+            </a:srgbClr>
+          </a:solidFill>
+          <a:ln>
+            <a:noFill/>
+          </a:ln>
+        </p:spPr>
+        <p:style>
+          <a:lnRef idx="1">
+            <a:schemeClr val="accent1"/>
+          </a:lnRef>
+          <a:fillRef idx="3">
+            <a:schemeClr val="accent1"/>
+          </a:fillRef>
+          <a:effectRef idx="2">
+            <a:schemeClr val="accent1"/>
+          </a:effectRef>
+          <a:fontRef idx="minor">
+            <a:schemeClr val="lt1"/>
+          </a:fontRef>
+        </p:style>
+        <p:txBody>
+          <a:bodyPr rtlCol="0" anchor="ctr"/>
+          <a:lstStyle/>
+          <a:p>
+            <a:pPr algn="ctr"/>
+          </a:p>
+        </p:txBody>
+      </p:sp>
+      <p:sp>
+        <p:nvSpPr>
+          <p:cNvPr id="23" name="Rectangle 22"/>
+          <p:cNvSpPr/>
+          <p:nvPr/>
+        </p:nvSpPr>
+        <p:spPr>
+          <a:xfrm>
+            <a:off x="10469880" y="868680"/>
+            <a:ext cx="73152" cy="73152"/>
+          </a:xfrm>
+          <a:prstGeom prst="rect">
+            <a:avLst/>
+          </a:prstGeom>
+          <a:solidFill>
+            <a:srgbClr val="FFFFFF">
+              <a:lumMod val="50000"/>
+            </a:srgbClr>
+          </a:solidFill>
+          <a:ln>
+            <a:noFill/>
+          </a:ln>
+        </p:spPr>
+        <p:style>
+          <a:lnRef idx="1">
+            <a:schemeClr val="accent1"/>
+          </a:lnRef>
+          <a:fillRef idx="3">
+            <a:schemeClr val="accent1"/>
+          </a:fillRef>
+          <a:effectRef idx="2">
+            <a:schemeClr val="accent1"/>
+          </a:effectRef>
+          <a:fontRef idx="minor">
+            <a:schemeClr val="lt1"/>
+          </a:fontRef>
+        </p:style>
+        <p:txBody>
+          <a:bodyPr rtlCol="0" anchor="ctr"/>
+          <a:lstStyle/>
+          <a:p>
+            <a:pPr algn="ctr"/>
+          </a:p>
+        </p:txBody>
+      </p:sp>
+      <p:sp>
+        <p:nvSpPr>
+          <p:cNvPr id="24" name="Rectangle 23"/>
+          <p:cNvSpPr/>
+          <p:nvPr/>
+        </p:nvSpPr>
+        <p:spPr>
+          <a:xfrm>
+            <a:off x="10469880" y="1005840"/>
+            <a:ext cx="73152" cy="73152"/>
+          </a:xfrm>
+          <a:prstGeom prst="rect">
+            <a:avLst/>
+          </a:prstGeom>
+          <a:solidFill>
+            <a:srgbClr val="FFFFFF">
+              <a:lumMod val="50000"/>
+            </a:srgbClr>
+          </a:solidFill>
+          <a:ln>
+            <a:noFill/>
+          </a:ln>
+        </p:spPr>
+        <p:style>
+          <a:lnRef idx="1">
+            <a:schemeClr val="accent1"/>
+          </a:lnRef>
+          <a:fillRef idx="3">
+            <a:schemeClr val="accent1"/>
+          </a:fillRef>
+          <a:effectRef idx="2">
+            <a:schemeClr val="accent1"/>
+          </a:effectRef>
+          <a:fontRef idx="minor">
+            <a:schemeClr val="lt1"/>
+          </a:fontRef>
+        </p:style>
+        <p:txBody>
+          <a:bodyPr rtlCol="0" anchor="ctr"/>
+          <a:lstStyle/>
+          <a:p>
+            <a:pPr algn="ctr"/>
+          </a:p>
+        </p:txBody>
+      </p:sp>
+      <p:sp>
+        <p:nvSpPr>
+          <p:cNvPr id="25" name="Rectangle 24"/>
+          <p:cNvSpPr/>
+          <p:nvPr/>
+        </p:nvSpPr>
+        <p:spPr>
+          <a:xfrm>
+            <a:off x="10469880" y="1143000"/>
+            <a:ext cx="73152" cy="73152"/>
+          </a:xfrm>
+          <a:prstGeom prst="rect">
+            <a:avLst/>
+          </a:prstGeom>
+          <a:solidFill>
+            <a:srgbClr val="FFFFFF">
+              <a:lumMod val="50000"/>
+            </a:srgbClr>
+          </a:solidFill>
+          <a:ln>
+            <a:noFill/>
+          </a:ln>
+        </p:spPr>
+        <p:style>
+          <a:lnRef idx="1">
+            <a:schemeClr val="accent1"/>
+          </a:lnRef>
+          <a:fillRef idx="3">
+            <a:schemeClr val="accent1"/>
+          </a:fillRef>
+          <a:effectRef idx="2">
+            <a:schemeClr val="accent1"/>
+          </a:effectRef>
+          <a:fontRef idx="minor">
+            <a:schemeClr val="lt1"/>
+          </a:fontRef>
+        </p:style>
+        <p:txBody>
+          <a:bodyPr rtlCol="0" anchor="ctr"/>
+          <a:lstStyle/>
+          <a:p>
+            <a:pPr algn="ctr"/>
+          </a:p>
+        </p:txBody>
+      </p:sp>
+      <p:sp>
+        <p:nvSpPr>
+          <p:cNvPr id="26" name="Rectangle 25"/>
+          <p:cNvSpPr/>
+          <p:nvPr/>
+        </p:nvSpPr>
+        <p:spPr>
+          <a:xfrm>
+            <a:off x="10607040" y="457200"/>
+            <a:ext cx="73152" cy="73152"/>
+          </a:xfrm>
+          <a:prstGeom prst="rect">
+            <a:avLst/>
+          </a:prstGeom>
+          <a:solidFill>
+            <a:srgbClr val="FFFFFF">
+              <a:lumMod val="50000"/>
+            </a:srgbClr>
+          </a:solidFill>
+          <a:ln>
+            <a:noFill/>
+          </a:ln>
+        </p:spPr>
+        <p:style>
+          <a:lnRef idx="1">
+            <a:schemeClr val="accent1"/>
+          </a:lnRef>
+          <a:fillRef idx="3">
+            <a:schemeClr val="accent1"/>
+          </a:fillRef>
+          <a:effectRef idx="2">
+            <a:schemeClr val="accent1"/>
+          </a:effectRef>
+          <a:fontRef idx="minor">
+            <a:schemeClr val="lt1"/>
+          </a:fontRef>
+        </p:style>
+        <p:txBody>
+          <a:bodyPr rtlCol="0" anchor="ctr"/>
+          <a:lstStyle/>
+          <a:p>
+            <a:pPr algn="ctr"/>
+          </a:p>
+        </p:txBody>
+      </p:sp>
+      <p:sp>
+        <p:nvSpPr>
+          <p:cNvPr id="27" name="Rectangle 26"/>
+          <p:cNvSpPr/>
+          <p:nvPr/>
+        </p:nvSpPr>
+        <p:spPr>
+          <a:xfrm>
+            <a:off x="10607040" y="594360"/>
+            <a:ext cx="73152" cy="73152"/>
+          </a:xfrm>
+          <a:prstGeom prst="rect">
+            <a:avLst/>
+          </a:prstGeom>
+          <a:solidFill>
+            <a:srgbClr val="FFFFFF">
+              <a:lumMod val="50000"/>
+            </a:srgbClr>
+          </a:solidFill>
+          <a:ln>
+            <a:noFill/>
+          </a:ln>
+        </p:spPr>
+        <p:style>
+          <a:lnRef idx="1">
+            <a:schemeClr val="accent1"/>
+          </a:lnRef>
+          <a:fillRef idx="3">
+            <a:schemeClr val="accent1"/>
+          </a:fillRef>
+          <a:effectRef idx="2">
+            <a:schemeClr val="accent1"/>
+          </a:effectRef>
+          <a:fontRef idx="minor">
+            <a:schemeClr val="lt1"/>
+          </a:fontRef>
+        </p:style>
+        <p:txBody>
+          <a:bodyPr rtlCol="0" anchor="ctr"/>
+          <a:lstStyle/>
+          <a:p>
+            <a:pPr algn="ctr"/>
+          </a:p>
+        </p:txBody>
+      </p:sp>
+      <p:sp>
+        <p:nvSpPr>
+          <p:cNvPr id="28" name="Rectangle 27"/>
+          <p:cNvSpPr/>
+          <p:nvPr/>
+        </p:nvSpPr>
+        <p:spPr>
+          <a:xfrm>
+            <a:off x="10607040" y="731520"/>
+            <a:ext cx="73152" cy="73152"/>
+          </a:xfrm>
+          <a:prstGeom prst="rect">
+            <a:avLst/>
+          </a:prstGeom>
+          <a:solidFill>
+            <a:srgbClr val="FFFFFF">
+              <a:lumMod val="50000"/>
+            </a:srgbClr>
+          </a:solidFill>
+          <a:ln>
+            <a:noFill/>
+          </a:ln>
+        </p:spPr>
+        <p:style>
+          <a:lnRef idx="1">
+            <a:schemeClr val="accent1"/>
+          </a:lnRef>
+          <a:fillRef idx="3">
+            <a:schemeClr val="accent1"/>
+          </a:fillRef>
+          <a:effectRef idx="2">
+            <a:schemeClr val="accent1"/>
+          </a:effectRef>
+          <a:fontRef idx="minor">
+            <a:schemeClr val="lt1"/>
+          </a:fontRef>
+        </p:style>
+        <p:txBody>
+          <a:bodyPr rtlCol="0" anchor="ctr"/>
+          <a:lstStyle/>
+          <a:p>
+            <a:pPr algn="ctr"/>
+          </a:p>
+        </p:txBody>
+      </p:sp>
+      <p:sp>
+        <p:nvSpPr>
+          <p:cNvPr id="29" name="Rectangle 28"/>
+          <p:cNvSpPr/>
+          <p:nvPr/>
+        </p:nvSpPr>
+        <p:spPr>
+          <a:xfrm>
+            <a:off x="10607040" y="868680"/>
+            <a:ext cx="73152" cy="73152"/>
+          </a:xfrm>
+          <a:prstGeom prst="rect">
+            <a:avLst/>
+          </a:prstGeom>
+          <a:solidFill>
+            <a:srgbClr val="FFFFFF">
+              <a:lumMod val="50000"/>
+            </a:srgbClr>
+          </a:solidFill>
+          <a:ln>
+            <a:noFill/>
+          </a:ln>
+        </p:spPr>
+        <p:style>
+          <a:lnRef idx="1">
+            <a:schemeClr val="accent1"/>
+          </a:lnRef>
+          <a:fillRef idx="3">
+            <a:schemeClr val="accent1"/>
+          </a:fillRef>
+          <a:effectRef idx="2">
+            <a:schemeClr val="accent1"/>
+          </a:effectRef>
+          <a:fontRef idx="minor">
+            <a:schemeClr val="lt1"/>
+          </a:fontRef>
+        </p:style>
+        <p:txBody>
+          <a:bodyPr rtlCol="0" anchor="ctr"/>
+          <a:lstStyle/>
+          <a:p>
+            <a:pPr algn="ctr"/>
+          </a:p>
+        </p:txBody>
+      </p:sp>
+      <p:sp>
+        <p:nvSpPr>
+          <p:cNvPr id="30" name="Rectangle 29"/>
+          <p:cNvSpPr/>
+          <p:nvPr/>
+        </p:nvSpPr>
+        <p:spPr>
+          <a:xfrm>
+            <a:off x="10607040" y="1005840"/>
+            <a:ext cx="73152" cy="73152"/>
+          </a:xfrm>
+          <a:prstGeom prst="rect">
+            <a:avLst/>
+          </a:prstGeom>
+          <a:solidFill>
+            <a:srgbClr val="FFFFFF">
+              <a:lumMod val="50000"/>
+            </a:srgbClr>
+          </a:solidFill>
+          <a:ln>
+            <a:noFill/>
+          </a:ln>
+        </p:spPr>
+        <p:style>
+          <a:lnRef idx="1">
+            <a:schemeClr val="accent1"/>
+          </a:lnRef>
+          <a:fillRef idx="3">
+            <a:schemeClr val="accent1"/>
+          </a:fillRef>
+          <a:effectRef idx="2">
+            <a:schemeClr val="accent1"/>
+          </a:effectRef>
+          <a:fontRef idx="minor">
+            <a:schemeClr val="lt1"/>
+          </a:fontRef>
+        </p:style>
+        <p:txBody>
+          <a:bodyPr rtlCol="0" anchor="ctr"/>
+          <a:lstStyle/>
+          <a:p>
+            <a:pPr algn="ctr"/>
+          </a:p>
+        </p:txBody>
+      </p:sp>
+      <p:sp>
+        <p:nvSpPr>
+          <p:cNvPr id="31" name="Rectangle 30"/>
+          <p:cNvSpPr/>
+          <p:nvPr/>
+        </p:nvSpPr>
+        <p:spPr>
+          <a:xfrm>
+            <a:off x="10607040" y="1143000"/>
+            <a:ext cx="73152" cy="73152"/>
+          </a:xfrm>
+          <a:prstGeom prst="rect">
+            <a:avLst/>
+          </a:prstGeom>
+          <a:solidFill>
+            <a:srgbClr val="FFFFFF">
+              <a:lumMod val="50000"/>
+            </a:srgbClr>
+          </a:solidFill>
+          <a:ln>
+            <a:noFill/>
+          </a:ln>
+        </p:spPr>
+        <p:style>
+          <a:lnRef idx="1">
+            <a:schemeClr val="accent1"/>
+          </a:lnRef>
+          <a:fillRef idx="3">
+            <a:schemeClr val="accent1"/>
+          </a:fillRef>
+          <a:effectRef idx="2">
+            <a:schemeClr val="accent1"/>
+          </a:effectRef>
+          <a:fontRef idx="minor">
+            <a:schemeClr val="lt1"/>
+          </a:fontRef>
+        </p:style>
+        <p:txBody>
+          <a:bodyPr rtlCol="0" anchor="ctr"/>
+          <a:lstStyle/>
+          <a:p>
+            <a:pPr algn="ctr"/>
+          </a:p>
+        </p:txBody>
+      </p:sp>
+      <p:sp>
+        <p:nvSpPr>
+          <p:cNvPr id="32" name="Rectangle 31"/>
+          <p:cNvSpPr/>
+          <p:nvPr/>
+        </p:nvSpPr>
+        <p:spPr>
+          <a:xfrm>
+            <a:off x="10744200" y="457200"/>
+            <a:ext cx="73152" cy="73152"/>
+          </a:xfrm>
+          <a:prstGeom prst="rect">
+            <a:avLst/>
+          </a:prstGeom>
+          <a:solidFill>
+            <a:srgbClr val="FFFFFF">
+              <a:lumMod val="50000"/>
+            </a:srgbClr>
+          </a:solidFill>
+          <a:ln>
+            <a:noFill/>
+          </a:ln>
+        </p:spPr>
+        <p:style>
+          <a:lnRef idx="1">
+            <a:schemeClr val="accent1"/>
+          </a:lnRef>
+          <a:fillRef idx="3">
+            <a:schemeClr val="accent1"/>
+          </a:fillRef>
+          <a:effectRef idx="2">
+            <a:schemeClr val="accent1"/>
+          </a:effectRef>
+          <a:fontRef idx="minor">
+            <a:schemeClr val="lt1"/>
+          </a:fontRef>
+        </p:style>
+        <p:txBody>
+          <a:bodyPr rtlCol="0" anchor="ctr"/>
+          <a:lstStyle/>
+          <a:p>
+            <a:pPr algn="ctr"/>
+          </a:p>
+        </p:txBody>
+      </p:sp>
+      <p:sp>
+        <p:nvSpPr>
+          <p:cNvPr id="33" name="Rectangle 32"/>
+          <p:cNvSpPr/>
+          <p:nvPr/>
+        </p:nvSpPr>
+        <p:spPr>
+          <a:xfrm>
+            <a:off x="10744200" y="594360"/>
+            <a:ext cx="73152" cy="73152"/>
+          </a:xfrm>
+          <a:prstGeom prst="rect">
+            <a:avLst/>
+          </a:prstGeom>
+          <a:solidFill>
+            <a:srgbClr val="FFFFFF">
+              <a:lumMod val="50000"/>
+            </a:srgbClr>
+          </a:solidFill>
+          <a:ln>
+            <a:noFill/>
+          </a:ln>
+        </p:spPr>
+        <p:style>
+          <a:lnRef idx="1">
+            <a:schemeClr val="accent1"/>
+          </a:lnRef>
+          <a:fillRef idx="3">
+            <a:schemeClr val="accent1"/>
+          </a:fillRef>
+          <a:effectRef idx="2">
+            <a:schemeClr val="accent1"/>
+          </a:effectRef>
+          <a:fontRef idx="minor">
+            <a:schemeClr val="lt1"/>
+          </a:fontRef>
+        </p:style>
+        <p:txBody>
+          <a:bodyPr rtlCol="0" anchor="ctr"/>
+          <a:lstStyle/>
+          <a:p>
+            <a:pPr algn="ctr"/>
+          </a:p>
+        </p:txBody>
+      </p:sp>
+      <p:sp>
+        <p:nvSpPr>
+          <p:cNvPr id="34" name="Rectangle 33"/>
+          <p:cNvSpPr/>
+          <p:nvPr/>
+        </p:nvSpPr>
+        <p:spPr>
+          <a:xfrm>
+            <a:off x="10744200" y="731520"/>
+            <a:ext cx="73152" cy="73152"/>
+          </a:xfrm>
+          <a:prstGeom prst="rect">
+            <a:avLst/>
+          </a:prstGeom>
+          <a:solidFill>
+            <a:srgbClr val="FFFFFF">
+              <a:lumMod val="50000"/>
+            </a:srgbClr>
+          </a:solidFill>
+          <a:ln>
+            <a:noFill/>
+          </a:ln>
+        </p:spPr>
+        <p:style>
+          <a:lnRef idx="1">
+            <a:schemeClr val="accent1"/>
+          </a:lnRef>
+          <a:fillRef idx="3">
+            <a:schemeClr val="accent1"/>
+          </a:fillRef>
+          <a:effectRef idx="2">
+            <a:schemeClr val="accent1"/>
+          </a:effectRef>
+          <a:fontRef idx="minor">
+            <a:schemeClr val="lt1"/>
+          </a:fontRef>
+        </p:style>
+        <p:txBody>
+          <a:bodyPr rtlCol="0" anchor="ctr"/>
+          <a:lstStyle/>
+          <a:p>
+            <a:pPr algn="ctr"/>
+          </a:p>
+        </p:txBody>
+      </p:sp>
+      <p:sp>
+        <p:nvSpPr>
+          <p:cNvPr id="35" name="Rectangle 34"/>
+          <p:cNvSpPr/>
+          <p:nvPr/>
+        </p:nvSpPr>
+        <p:spPr>
+          <a:xfrm>
+            <a:off x="10744200" y="868680"/>
+            <a:ext cx="73152" cy="73152"/>
+          </a:xfrm>
+          <a:prstGeom prst="rect">
+            <a:avLst/>
+          </a:prstGeom>
+          <a:solidFill>
+            <a:srgbClr val="FFFFFF">
+              <a:lumMod val="50000"/>
+            </a:srgbClr>
+          </a:solidFill>
+          <a:ln>
+            <a:noFill/>
+          </a:ln>
+        </p:spPr>
+        <p:style>
+          <a:lnRef idx="1">
+            <a:schemeClr val="accent1"/>
+          </a:lnRef>
+          <a:fillRef idx="3">
+            <a:schemeClr val="accent1"/>
+          </a:fillRef>
+          <a:effectRef idx="2">
+            <a:schemeClr val="accent1"/>
+          </a:effectRef>
+          <a:fontRef idx="minor">
+            <a:schemeClr val="lt1"/>
+          </a:fontRef>
+        </p:style>
+        <p:txBody>
+          <a:bodyPr rtlCol="0" anchor="ctr"/>
+          <a:lstStyle/>
+          <a:p>
+            <a:pPr algn="ctr"/>
+          </a:p>
+        </p:txBody>
+      </p:sp>
+      <p:sp>
+        <p:nvSpPr>
+          <p:cNvPr id="36" name="Rectangle 35"/>
+          <p:cNvSpPr/>
+          <p:nvPr/>
+        </p:nvSpPr>
+        <p:spPr>
+          <a:xfrm>
+            <a:off x="10744200" y="1005840"/>
+            <a:ext cx="73152" cy="73152"/>
+          </a:xfrm>
+          <a:prstGeom prst="rect">
+            <a:avLst/>
+          </a:prstGeom>
+          <a:solidFill>
+            <a:srgbClr val="FFFFFF">
+              <a:lumMod val="50000"/>
+            </a:srgbClr>
+          </a:solidFill>
+          <a:ln>
+            <a:noFill/>
+          </a:ln>
+        </p:spPr>
+        <p:style>
+          <a:lnRef idx="1">
+            <a:schemeClr val="accent1"/>
+          </a:lnRef>
+          <a:fillRef idx="3">
+            <a:schemeClr val="accent1"/>
+          </a:fillRef>
+          <a:effectRef idx="2">
+            <a:schemeClr val="accent1"/>
+          </a:effectRef>
+          <a:fontRef idx="minor">
+            <a:schemeClr val="lt1"/>
+          </a:fontRef>
+        </p:style>
+        <p:txBody>
+          <a:bodyPr rtlCol="0" anchor="ctr"/>
+          <a:lstStyle/>
+          <a:p>
+            <a:pPr algn="ctr"/>
+          </a:p>
+        </p:txBody>
+      </p:sp>
+      <p:sp>
+        <p:nvSpPr>
+          <p:cNvPr id="37" name="Rectangle 36"/>
+          <p:cNvSpPr/>
+          <p:nvPr/>
+        </p:nvSpPr>
+        <p:spPr>
+          <a:xfrm>
+            <a:off x="10744200" y="1143000"/>
+            <a:ext cx="73152" cy="73152"/>
+          </a:xfrm>
+          <a:prstGeom prst="rect">
+            <a:avLst/>
+          </a:prstGeom>
+          <a:solidFill>
+            <a:srgbClr val="FFFFFF">
+              <a:lumMod val="50000"/>
+            </a:srgbClr>
+          </a:solidFill>
+          <a:ln>
+            <a:noFill/>
+          </a:ln>
+        </p:spPr>
+        <p:style>
+          <a:lnRef idx="1">
+            <a:schemeClr val="accent1"/>
+          </a:lnRef>
+          <a:fillRef idx="3">
+            <a:schemeClr val="accent1"/>
+          </a:fillRef>
+          <a:effectRef idx="2">
+            <a:schemeClr val="accent1"/>
+          </a:effectRef>
+          <a:fontRef idx="minor">
+            <a:schemeClr val="lt1"/>
+          </a:fontRef>
+        </p:style>
+        <p:txBody>
+          <a:bodyPr rtlCol="0" anchor="ctr"/>
+          <a:lstStyle/>
+          <a:p>
+            <a:pPr algn="ctr"/>
+          </a:p>
+        </p:txBody>
+      </p:sp>
+      <p:sp>
+        <p:nvSpPr>
+          <p:cNvPr id="38" name="TextBox 37"/>
+          <p:cNvSpPr txBox="1"/>
+          <p:nvPr/>
+        </p:nvSpPr>
+        <p:spPr>
+          <a:xfrm>
+            <a:off x="1371600" y="2286000"/>
+            <a:ext cx="9144000" cy="1371600"/>
+          </a:xfrm>
+          <a:prstGeom prst="rect">
+            <a:avLst/>
+          </a:prstGeom>
+          <a:noFill/>
+        </p:spPr>
+        <p:txBody>
+          <a:bodyPr wrap="none">
+            <a:spAutoFit/>
+          </a:bodyPr>
+          <a:lstStyle/>
+          <a:p>
+            <a:pPr algn="ctr">
+              <a:defRPr sz="6600" b="1">
                 <a:solidFill>
                   <a:srgbClr val="FFFFFF"/>
                 </a:solidFill>
               </a:defRPr>
             </a:pPr>
             <a:r>
-              <a:t>现代商务风格</a:t>
-            </a:r>
-          </a:p>
-        </p:txBody>
-      </p:sp>
-      <p:sp>
-        <p:nvSpPr>
-          <p:cNvPr id="3" name="Subtitle 2"/>
-          <p:cNvSpPr>
-            <a:spLocks noGrp="1"/>
-          </p:cNvSpPr>
-          <p:nvPr>
-            <p:ph type="subTitle" idx="1"/>
-          </p:nvPr>
-        </p:nvSpPr>
-        <p:spPr/>
-        <p:txBody>
-          <a:bodyPr/>
-          <a:lstStyle/>
-          <a:p>
-            <a:pPr>
-              <a:defRPr sz="2800">
+              <a:t>演示文稿标题</a:t>
+            </a:r>
+          </a:p>
+        </p:txBody>
+      </p:sp>
+      <p:sp>
+        <p:nvSpPr>
+          <p:cNvPr id="39" name="TextBox 38"/>
+          <p:cNvSpPr txBox="1"/>
+          <p:nvPr/>
+        </p:nvSpPr>
+        <p:spPr>
+          <a:xfrm>
+            <a:off x="1828800" y="3840480"/>
+            <a:ext cx="8531352" cy="548640"/>
+          </a:xfrm>
+          <a:prstGeom prst="rect">
+            <a:avLst/>
+          </a:prstGeom>
+          <a:noFill/>
+        </p:spPr>
+        <p:txBody>
+          <a:bodyPr wrap="none">
+            <a:spAutoFit/>
+          </a:bodyPr>
+          <a:lstStyle/>
+          <a:p>
+            <a:pPr algn="ctr">
+              <a:defRPr sz="2400">
                 <a:solidFill>
-                  <a:srgbClr val="ECF0F1"/>
+                  <a:srgbClr val="FFFFFF"/>
                 </a:solidFill>
               </a:defRPr>
             </a:pPr>
             <a:r>
-              <a:t>专业 · 简洁 · 高效</a:t>
-            </a:r>
-          </a:p>
-        </p:txBody>
-      </p:sp>
-      <p:sp>
-        <p:nvSpPr>
-          <p:cNvPr id="4" name="Rectangle 3"/>
+              <a:t>副标题或描述信息</a:t>
+            </a:r>
+          </a:p>
+        </p:txBody>
+      </p:sp>
+      <p:sp>
+        <p:nvSpPr>
+          <p:cNvPr id="40" name="Rounded Rectangle 39"/>
           <p:cNvSpPr/>
           <p:nvPr/>
         </p:nvSpPr>
         <p:spPr>
           <a:xfrm>
-            <a:off x="-914400" y="3200400"/>
-            <a:ext cx="3200400" cy="3200400"/>
-          </a:xfrm>
-          <a:prstGeom prst="rect">
+            <a:off x="2286000" y="5486400"/>
+            <a:ext cx="2743200" cy="365760"/>
+          </a:xfrm>
+          <a:prstGeom prst="roundRect">
             <a:avLst/>
           </a:prstGeom>
           <a:solidFill>
-            <a:srgbClr val="2980B9"/>
+            <a:srgbClr val="FFFFFF">
+              <a:lumMod val="70000"/>
+            </a:srgbClr>
           </a:solidFill>
           <a:ln>
             <a:noFill/>
@@ -3200,26 +4837,37 @@
           <a:bodyPr rtlCol="0" anchor="ctr"/>
           <a:lstStyle/>
           <a:p>
-            <a:pPr algn="ctr"/>
-          </a:p>
-        </p:txBody>
-      </p:sp>
-      <p:sp>
-        <p:nvSpPr>
-          <p:cNvPr id="5" name="Rectangle 4"/>
+            <a:pPr algn="ctr">
+              <a:defRPr sz="1800">
+                <a:solidFill>
+                  <a:srgbClr val="FFFFFF"/>
+                </a:solidFill>
+              </a:defRPr>
+            </a:pPr>
+            <a:r>
+              <a:t>汇报人: XXX</a:t>
+            </a:r>
+          </a:p>
+        </p:txBody>
+      </p:sp>
+      <p:sp>
+        <p:nvSpPr>
+          <p:cNvPr id="41" name="Rounded Rectangle 40"/>
           <p:cNvSpPr/>
           <p:nvPr/>
         </p:nvSpPr>
         <p:spPr>
           <a:xfrm>
-            <a:off x="7315200" y="-914400"/>
-            <a:ext cx="2743200" cy="2743200"/>
-          </a:xfrm>
-          <a:prstGeom prst="rect">
+            <a:off x="6858000" y="5486400"/>
+            <a:ext cx="2743200" cy="365760"/>
+          </a:xfrm>
+          <a:prstGeom prst="roundRect">
             <a:avLst/>
           </a:prstGeom>
           <a:solidFill>
-            <a:srgbClr val="F39C12"/>
+            <a:srgbClr val="FFFFFF">
+              <a:lumMod val="70000"/>
+            </a:srgbClr>
           </a:solidFill>
           <a:ln>
             <a:noFill/>
@@ -3243,7 +4891,16 @@
           <a:bodyPr rtlCol="0" anchor="ctr"/>
           <a:lstStyle/>
           <a:p>
-            <a:pPr algn="ctr"/>
+            <a:pPr algn="ctr">
+              <a:defRPr sz="1800">
+                <a:solidFill>
+                  <a:srgbClr val="FFFFFF"/>
+                </a:solidFill>
+              </a:defRPr>
+            </a:pPr>
+            <a:r>
+              <a:t>日期: 2025/01/01</a:t>
+            </a:r>
           </a:p>
         </p:txBody>
       </p:sp>
@@ -3263,13 +4920,13 @@
         <a:gradFill rotWithShape="1">
           <a:gsLst>
             <a:gs pos="0">
-              <a:srgbClr val="0D1B3E"/>
+              <a:srgbClr val="015DBB"/>
             </a:gs>
             <a:gs pos="100000">
-              <a:srgbClr val="19376D"/>
+              <a:srgbClr val="64B4FF"/>
             </a:gs>
           </a:gsLst>
-          <a:lin scaled="0" ang="16200000"/>
+          <a:lin scaled="0" ang="13500000"/>
         </a:gradFill>
         <a:effectLst/>
       </p:bgPr>
@@ -3283,112 +4940,219 @@
       <p:grpSpPr/>
       <p:sp>
         <p:nvSpPr>
-          <p:cNvPr id="2" name="Title 1"/>
-          <p:cNvSpPr>
-            <a:spLocks noGrp="1"/>
-          </p:cNvSpPr>
-          <p:nvPr>
-            <p:ph type="title"/>
-          </p:nvPr>
-        </p:nvSpPr>
-        <p:spPr/>
-        <p:txBody>
-          <a:bodyPr/>
+          <p:cNvPr id="2" name="Rectangle 1"/>
+          <p:cNvSpPr/>
+          <p:nvPr/>
+        </p:nvSpPr>
+        <p:spPr>
+          <a:xfrm>
+            <a:off x="0" y="0"/>
+            <a:ext cx="12188952" cy="1097280"/>
+          </a:xfrm>
+          <a:prstGeom prst="rect">
+            <a:avLst/>
+          </a:prstGeom>
+          <a:solidFill>
+            <a:srgbClr val="FFFFFF"/>
+          </a:solidFill>
+          <a:ln>
+            <a:noFill/>
+          </a:ln>
+        </p:spPr>
+        <p:style>
+          <a:lnRef idx="1">
+            <a:schemeClr val="accent1"/>
+          </a:lnRef>
+          <a:fillRef idx="3">
+            <a:schemeClr val="accent1"/>
+          </a:fillRef>
+          <a:effectRef idx="2">
+            <a:schemeClr val="accent1"/>
+          </a:effectRef>
+          <a:fontRef idx="minor">
+            <a:schemeClr val="lt1"/>
+          </a:fontRef>
+        </p:style>
+        <p:txBody>
+          <a:bodyPr rtlCol="0" anchor="ctr"/>
           <a:lstStyle/>
           <a:p>
             <a:pPr>
               <a:defRPr sz="3600" b="1">
+                <a:solidFill>
+                  <a:srgbClr val="015DBB"/>
+                </a:solidFill>
+              </a:defRPr>
+            </a:pPr>
+            <a:r>
+              <a:t>内容页标题</a:t>
+            </a:r>
+          </a:p>
+        </p:txBody>
+      </p:sp>
+      <p:sp>
+        <p:nvSpPr>
+          <p:cNvPr id="3" name="Rectangle 2"/>
+          <p:cNvSpPr/>
+          <p:nvPr/>
+        </p:nvSpPr>
+        <p:spPr>
+          <a:xfrm>
+            <a:off x="731520" y="1645920"/>
+            <a:ext cx="10725912" cy="4572000"/>
+          </a:xfrm>
+          <a:prstGeom prst="rect">
+            <a:avLst/>
+          </a:prstGeom>
+          <a:solidFill>
+            <a:srgbClr val="FFFFFF"/>
+          </a:solidFill>
+          <a:ln>
+            <a:noFill/>
+          </a:ln>
+        </p:spPr>
+        <p:style>
+          <a:lnRef idx="1">
+            <a:schemeClr val="accent1"/>
+          </a:lnRef>
+          <a:fillRef idx="3">
+            <a:schemeClr val="accent1"/>
+          </a:fillRef>
+          <a:effectRef idx="2">
+            <a:schemeClr val="accent1"/>
+          </a:effectRef>
+          <a:fontRef idx="minor">
+            <a:schemeClr val="lt1"/>
+          </a:fontRef>
+        </p:style>
+        <p:txBody>
+          <a:bodyPr rtlCol="0" anchor="ctr"/>
+          <a:lstStyle/>
+          <a:p>
+            <a:pPr>
+              <a:defRPr sz="2400">
+                <a:solidFill>
+                  <a:srgbClr val="323232"/>
+                </a:solidFill>
+              </a:defRPr>
+            </a:pPr>
+            <a:r>
+              <a:t>• 要点1</a:t>
+            </a:r>
+          </a:p>
+          <a:p>
+            <a:r>
+              <a:t>• 要点2</a:t>
+            </a:r>
+          </a:p>
+          <a:p>
+            <a:r>
+              <a:t>• 要点3</a:t>
+            </a:r>
+          </a:p>
+        </p:txBody>
+      </p:sp>
+    </p:spTree>
+  </p:cSld>
+  <p:clrMapOvr>
+    <a:masterClrMapping/>
+  </p:clrMapOvr>
+</p:sld>
+</file>
+
+<file path=ppt/slides/slide3.xml><?xml version="1.0" encoding="utf-8"?>
+<p:sld xmlns:a="http://schemas.openxmlformats.org/drawingml/2006/main" xmlns:p="http://schemas.openxmlformats.org/presentationml/2006/main" xmlns:r="http://schemas.openxmlformats.org/officeDocument/2006/relationships">
+  <p:cSld>
+    <p:bg>
+      <p:bgPr>
+        <a:gradFill rotWithShape="1">
+          <a:gsLst>
+            <a:gs pos="0">
+              <a:srgbClr val="015DBB"/>
+            </a:gs>
+            <a:gs pos="100000">
+              <a:srgbClr val="64B4FF"/>
+            </a:gs>
+          </a:gsLst>
+          <a:lin scaled="0" ang="13500000"/>
+        </a:gradFill>
+        <a:effectLst/>
+      </p:bgPr>
+    </p:bg>
+    <p:spTree>
+      <p:nvGrpSpPr>
+        <p:cNvPr id="1" name=""/>
+        <p:cNvGrpSpPr/>
+        <p:nvPr/>
+      </p:nvGrpSpPr>
+      <p:grpSpPr/>
+      <p:sp>
+        <p:nvSpPr>
+          <p:cNvPr id="2" name="TextBox 1"/>
+          <p:cNvSpPr txBox="1"/>
+          <p:nvPr/>
+        </p:nvSpPr>
+        <p:spPr>
+          <a:xfrm>
+            <a:off x="2743200" y="1828800"/>
+            <a:ext cx="6702552" cy="1828800"/>
+          </a:xfrm>
+          <a:prstGeom prst="rect">
+            <a:avLst/>
+          </a:prstGeom>
+          <a:noFill/>
+        </p:spPr>
+        <p:txBody>
+          <a:bodyPr wrap="none">
+            <a:spAutoFit/>
+          </a:bodyPr>
+          <a:lstStyle/>
+          <a:p>
+            <a:pPr algn="ctr">
+              <a:defRPr sz="12000" b="1">
                 <a:solidFill>
                   <a:srgbClr val="FFFFFF"/>
                 </a:solidFill>
               </a:defRPr>
             </a:pPr>
             <a:r>
-              <a:t>内容页示例</a:t>
-            </a:r>
-          </a:p>
-        </p:txBody>
-      </p:sp>
-      <p:sp>
-        <p:nvSpPr>
-          <p:cNvPr id="3" name="Content Placeholder 2"/>
-          <p:cNvSpPr>
-            <a:spLocks noGrp="1"/>
-          </p:cNvSpPr>
-          <p:nvPr>
-            <p:ph idx="1"/>
-          </p:nvPr>
-        </p:nvSpPr>
-        <p:spPr/>
-        <p:txBody>
-          <a:bodyPr/>
-          <a:lstStyle/>
-          <a:p>
-            <a:pPr>
-              <a:defRPr sz="2000">
+              <a:t>01</a:t>
+            </a:r>
+          </a:p>
+        </p:txBody>
+      </p:sp>
+      <p:sp>
+        <p:nvSpPr>
+          <p:cNvPr id="3" name="TextBox 2"/>
+          <p:cNvSpPr txBox="1"/>
+          <p:nvPr/>
+        </p:nvSpPr>
+        <p:spPr>
+          <a:xfrm>
+            <a:off x="2743200" y="3840480"/>
+            <a:ext cx="6702552" cy="914400"/>
+          </a:xfrm>
+          <a:prstGeom prst="rect">
+            <a:avLst/>
+          </a:prstGeom>
+          <a:noFill/>
+        </p:spPr>
+        <p:txBody>
+          <a:bodyPr wrap="none">
+            <a:spAutoFit/>
+          </a:bodyPr>
+          <a:lstStyle/>
+          <a:p>
+            <a:pPr algn="ctr">
+              <a:defRPr sz="4800" b="1">
                 <a:solidFill>
-                  <a:srgbClr val="ECF0F1"/>
+                  <a:srgbClr val="FFFFFF"/>
                 </a:solidFill>
               </a:defRPr>
             </a:pPr>
             <a:r>
-              <a:t>核心业务指标</a:t>
-            </a:r>
-          </a:p>
-          <a:p>
-            <a:pPr>
-              <a:defRPr sz="2000">
-                <a:solidFill>
-                  <a:srgbClr val="ECF0F1"/>
-                </a:solidFill>
-              </a:defRPr>
-            </a:pPr>
-            <a:r>
-              <a:t>市场增长策略</a:t>
-            </a:r>
-          </a:p>
-        </p:txBody>
-      </p:sp>
-      <p:sp>
-        <p:nvSpPr>
-          <p:cNvPr id="4" name="Rectangle 3"/>
-          <p:cNvSpPr/>
-          <p:nvPr/>
-        </p:nvSpPr>
-        <p:spPr>
-          <a:xfrm>
-            <a:off x="0" y="0"/>
-            <a:ext cx="9144000" cy="137160"/>
-          </a:xfrm>
-          <a:prstGeom prst="rect">
-            <a:avLst/>
-          </a:prstGeom>
-          <a:solidFill>
-            <a:srgbClr val="3498DB"/>
-          </a:solidFill>
-          <a:ln>
-            <a:noFill/>
-          </a:ln>
-        </p:spPr>
-        <p:style>
-          <a:lnRef idx="1">
-            <a:schemeClr val="accent1"/>
-          </a:lnRef>
-          <a:fillRef idx="3">
-            <a:schemeClr val="accent1"/>
-          </a:fillRef>
-          <a:effectRef idx="2">
-            <a:schemeClr val="accent1"/>
-          </a:effectRef>
-          <a:fontRef idx="minor">
-            <a:schemeClr val="lt1"/>
-          </a:fontRef>
-        </p:style>
-        <p:txBody>
-          <a:bodyPr rtlCol="0" anchor="ctr"/>
-          <a:lstStyle/>
-          <a:p>
-            <a:pPr algn="ctr"/>
+              <a:t>章节标题</a:t>
+            </a:r>
           </a:p>
         </p:txBody>
       </p:sp>
